--- a/reports/Imbalanced_MC_Timeseries_Report_20260428_201112.pptx
+++ b/reports/Imbalanced_MC_Timeseries_Report_20260428_201112.pptx
@@ -5,20 +5,20 @@
     <p:sldMasterId id="2147483648" r:id="rId1"/>
   </p:sldMasterIdLst>
   <p:sldIdLst>
-    <p:sldId id="256" r:id="rId7"/>
-    <p:sldId id="257" r:id="rId8"/>
-    <p:sldId id="258" r:id="rId9"/>
-    <p:sldId id="259" r:id="rId10"/>
-    <p:sldId id="260" r:id="rId11"/>
-    <p:sldId id="261" r:id="rId12"/>
-    <p:sldId id="262" r:id="rId13"/>
-    <p:sldId id="263" r:id="rId14"/>
-    <p:sldId id="264" r:id="rId15"/>
-    <p:sldId id="265" r:id="rId16"/>
-    <p:sldId id="266" r:id="rId17"/>
-    <p:sldId id="267" r:id="rId18"/>
-    <p:sldId id="268" r:id="rId19"/>
-    <p:sldId id="269" r:id="rId20"/>
+    <p:sldId id="256" r:id="rId2"/>
+    <p:sldId id="257" r:id="rId3"/>
+    <p:sldId id="258" r:id="rId4"/>
+    <p:sldId id="259" r:id="rId5"/>
+    <p:sldId id="260" r:id="rId6"/>
+    <p:sldId id="261" r:id="rId7"/>
+    <p:sldId id="262" r:id="rId8"/>
+    <p:sldId id="263" r:id="rId9"/>
+    <p:sldId id="264" r:id="rId10"/>
+    <p:sldId id="265" r:id="rId11"/>
+    <p:sldId id="266" r:id="rId12"/>
+    <p:sldId id="267" r:id="rId13"/>
+    <p:sldId id="268" r:id="rId14"/>
+    <p:sldId id="269" r:id="rId15"/>
   </p:sldIdLst>
   <p:sldSz cx="9144000" cy="6858000" type="screen4x3"/>
   <p:notesSz cx="6858000" cy="9144000"/>
@@ -117,6 +117,22 @@
       </a:defRPr>
     </a:lvl9pPr>
   </p:defaultTextStyle>
+  <p:extLst>
+    <p:ext uri="{EFAFB233-063F-42B5-8137-9DF3F51BA10A}">
+      <p15:sldGuideLst xmlns:p15="http://schemas.microsoft.com/office/powerpoint/2012/main">
+        <p15:guide id="1" orient="horz" pos="2160">
+          <p15:clr>
+            <a:srgbClr val="A4A3A4"/>
+          </p15:clr>
+        </p15:guide>
+        <p15:guide id="2" pos="2880">
+          <p15:clr>
+            <a:srgbClr val="A4A3A4"/>
+          </p15:clr>
+        </p15:guide>
+      </p15:sldGuideLst>
+    </p:ext>
+  </p:extLst>
 </p:presentation>
 </file>
 
@@ -158,10 +174,9 @@
           <a:lstStyle/>
           <a:p>
             <a:r>
-              <a:rPr lang="en-US" smtClean="0"/>
+              <a:rPr lang="en-US"/>
               <a:t>Click to edit Master title style</a:t>
             </a:r>
-            <a:endParaRPr lang="en-US"/>
           </a:p>
         </p:txBody>
       </p:sp>
@@ -277,10 +292,9 @@
           </a:lstStyle>
           <a:p>
             <a:r>
-              <a:rPr lang="en-US" smtClean="0"/>
+              <a:rPr lang="en-US"/>
               <a:t>Click to edit Master subtitle style</a:t>
             </a:r>
-            <a:endParaRPr lang="en-US"/>
           </a:p>
         </p:txBody>
       </p:sp>
@@ -301,7 +315,7 @@
           <a:p>
             <a:fld id="{5BCAD085-E8A6-8845-BD4E-CB4CCA059FC4}" type="datetimeFigureOut">
               <a:rPr lang="en-US" smtClean="0"/>
-              <a:t>1/27/13</a:t>
+              <a:t>4/28/2026</a:t>
             </a:fld>
             <a:endParaRPr lang="en-US"/>
           </a:p>
@@ -395,10 +409,9 @@
           <a:lstStyle/>
           <a:p>
             <a:r>
-              <a:rPr lang="en-US" smtClean="0"/>
+              <a:rPr lang="en-US"/>
               <a:t>Click to edit Master title style</a:t>
             </a:r>
-            <a:endParaRPr lang="en-US"/>
           </a:p>
         </p:txBody>
       </p:sp>
@@ -419,38 +432,37 @@
           <a:p>
             <a:pPr lvl="0"/>
             <a:r>
-              <a:rPr lang="en-US" smtClean="0"/>
+              <a:rPr lang="en-US"/>
               <a:t>Click to edit Master text styles</a:t>
             </a:r>
           </a:p>
           <a:p>
             <a:pPr lvl="1"/>
             <a:r>
-              <a:rPr lang="en-US" smtClean="0"/>
+              <a:rPr lang="en-US"/>
               <a:t>Second level</a:t>
             </a:r>
           </a:p>
           <a:p>
             <a:pPr lvl="2"/>
             <a:r>
-              <a:rPr lang="en-US" smtClean="0"/>
+              <a:rPr lang="en-US"/>
               <a:t>Third level</a:t>
             </a:r>
           </a:p>
           <a:p>
             <a:pPr lvl="3"/>
             <a:r>
-              <a:rPr lang="en-US" smtClean="0"/>
+              <a:rPr lang="en-US"/>
               <a:t>Fourth level</a:t>
             </a:r>
           </a:p>
           <a:p>
             <a:pPr lvl="4"/>
             <a:r>
-              <a:rPr lang="en-US" smtClean="0"/>
+              <a:rPr lang="en-US"/>
               <a:t>Fifth level</a:t>
             </a:r>
-            <a:endParaRPr lang="en-US"/>
           </a:p>
         </p:txBody>
       </p:sp>
@@ -471,7 +483,7 @@
           <a:p>
             <a:fld id="{5BCAD085-E8A6-8845-BD4E-CB4CCA059FC4}" type="datetimeFigureOut">
               <a:rPr lang="en-US" smtClean="0"/>
-              <a:t>1/27/13</a:t>
+              <a:t>4/28/2026</a:t>
             </a:fld>
             <a:endParaRPr lang="en-US"/>
           </a:p>
@@ -570,10 +582,9 @@
           <a:lstStyle/>
           <a:p>
             <a:r>
-              <a:rPr lang="en-US" smtClean="0"/>
+              <a:rPr lang="en-US"/>
               <a:t>Click to edit Master title style</a:t>
             </a:r>
-            <a:endParaRPr lang="en-US"/>
           </a:p>
         </p:txBody>
       </p:sp>
@@ -599,38 +610,37 @@
           <a:p>
             <a:pPr lvl="0"/>
             <a:r>
-              <a:rPr lang="en-US" smtClean="0"/>
+              <a:rPr lang="en-US"/>
               <a:t>Click to edit Master text styles</a:t>
             </a:r>
           </a:p>
           <a:p>
             <a:pPr lvl="1"/>
             <a:r>
-              <a:rPr lang="en-US" smtClean="0"/>
+              <a:rPr lang="en-US"/>
               <a:t>Second level</a:t>
             </a:r>
           </a:p>
           <a:p>
             <a:pPr lvl="2"/>
             <a:r>
-              <a:rPr lang="en-US" smtClean="0"/>
+              <a:rPr lang="en-US"/>
               <a:t>Third level</a:t>
             </a:r>
           </a:p>
           <a:p>
             <a:pPr lvl="3"/>
             <a:r>
-              <a:rPr lang="en-US" smtClean="0"/>
+              <a:rPr lang="en-US"/>
               <a:t>Fourth level</a:t>
             </a:r>
           </a:p>
           <a:p>
             <a:pPr lvl="4"/>
             <a:r>
-              <a:rPr lang="en-US" smtClean="0"/>
+              <a:rPr lang="en-US"/>
               <a:t>Fifth level</a:t>
             </a:r>
-            <a:endParaRPr lang="en-US"/>
           </a:p>
         </p:txBody>
       </p:sp>
@@ -651,7 +661,7 @@
           <a:p>
             <a:fld id="{5BCAD085-E8A6-8845-BD4E-CB4CCA059FC4}" type="datetimeFigureOut">
               <a:rPr lang="en-US" smtClean="0"/>
-              <a:t>1/27/13</a:t>
+              <a:t>4/28/2026</a:t>
             </a:fld>
             <a:endParaRPr lang="en-US"/>
           </a:p>
@@ -745,10 +755,9 @@
           <a:lstStyle/>
           <a:p>
             <a:r>
-              <a:rPr lang="en-US" smtClean="0"/>
+              <a:rPr lang="en-US"/>
               <a:t>Click to edit Master title style</a:t>
             </a:r>
-            <a:endParaRPr lang="en-US"/>
           </a:p>
         </p:txBody>
       </p:sp>
@@ -769,38 +778,37 @@
           <a:p>
             <a:pPr lvl="0"/>
             <a:r>
-              <a:rPr lang="en-US" smtClean="0"/>
+              <a:rPr lang="en-US"/>
               <a:t>Click to edit Master text styles</a:t>
             </a:r>
           </a:p>
           <a:p>
             <a:pPr lvl="1"/>
             <a:r>
-              <a:rPr lang="en-US" smtClean="0"/>
+              <a:rPr lang="en-US"/>
               <a:t>Second level</a:t>
             </a:r>
           </a:p>
           <a:p>
             <a:pPr lvl="2"/>
             <a:r>
-              <a:rPr lang="en-US" smtClean="0"/>
+              <a:rPr lang="en-US"/>
               <a:t>Third level</a:t>
             </a:r>
           </a:p>
           <a:p>
             <a:pPr lvl="3"/>
             <a:r>
-              <a:rPr lang="en-US" smtClean="0"/>
+              <a:rPr lang="en-US"/>
               <a:t>Fourth level</a:t>
             </a:r>
           </a:p>
           <a:p>
             <a:pPr lvl="4"/>
             <a:r>
-              <a:rPr lang="en-US" smtClean="0"/>
+              <a:rPr lang="en-US"/>
               <a:t>Fifth level</a:t>
             </a:r>
-            <a:endParaRPr lang="en-US"/>
           </a:p>
         </p:txBody>
       </p:sp>
@@ -821,7 +829,7 @@
           <a:p>
             <a:fld id="{5BCAD085-E8A6-8845-BD4E-CB4CCA059FC4}" type="datetimeFigureOut">
               <a:rPr lang="en-US" smtClean="0"/>
-              <a:t>1/27/13</a:t>
+              <a:t>4/28/2026</a:t>
             </a:fld>
             <a:endParaRPr lang="en-US"/>
           </a:p>
@@ -924,10 +932,9 @@
           </a:lstStyle>
           <a:p>
             <a:r>
-              <a:rPr lang="en-US" smtClean="0"/>
+              <a:rPr lang="en-US"/>
               <a:t>Click to edit Master title style</a:t>
             </a:r>
-            <a:endParaRPr lang="en-US"/>
           </a:p>
         </p:txBody>
       </p:sp>
@@ -1044,7 +1051,7 @@
           <a:p>
             <a:pPr lvl="0"/>
             <a:r>
-              <a:rPr lang="en-US" smtClean="0"/>
+              <a:rPr lang="en-US"/>
               <a:t>Click to edit Master text styles</a:t>
             </a:r>
           </a:p>
@@ -1067,7 +1074,7 @@
           <a:p>
             <a:fld id="{5BCAD085-E8A6-8845-BD4E-CB4CCA059FC4}" type="datetimeFigureOut">
               <a:rPr lang="en-US" smtClean="0"/>
-              <a:t>1/27/13</a:t>
+              <a:t>4/28/2026</a:t>
             </a:fld>
             <a:endParaRPr lang="en-US"/>
           </a:p>
@@ -1161,10 +1168,9 @@
           <a:lstStyle/>
           <a:p>
             <a:r>
-              <a:rPr lang="en-US" smtClean="0"/>
+              <a:rPr lang="en-US"/>
               <a:t>Click to edit Master title style</a:t>
             </a:r>
-            <a:endParaRPr lang="en-US"/>
           </a:p>
         </p:txBody>
       </p:sp>
@@ -1218,38 +1224,37 @@
           <a:p>
             <a:pPr lvl="0"/>
             <a:r>
-              <a:rPr lang="en-US" smtClean="0"/>
+              <a:rPr lang="en-US"/>
               <a:t>Click to edit Master text styles</a:t>
             </a:r>
           </a:p>
           <a:p>
             <a:pPr lvl="1"/>
             <a:r>
-              <a:rPr lang="en-US" smtClean="0"/>
+              <a:rPr lang="en-US"/>
               <a:t>Second level</a:t>
             </a:r>
           </a:p>
           <a:p>
             <a:pPr lvl="2"/>
             <a:r>
-              <a:rPr lang="en-US" smtClean="0"/>
+              <a:rPr lang="en-US"/>
               <a:t>Third level</a:t>
             </a:r>
           </a:p>
           <a:p>
             <a:pPr lvl="3"/>
             <a:r>
-              <a:rPr lang="en-US" smtClean="0"/>
+              <a:rPr lang="en-US"/>
               <a:t>Fourth level</a:t>
             </a:r>
           </a:p>
           <a:p>
             <a:pPr lvl="4"/>
             <a:r>
-              <a:rPr lang="en-US" smtClean="0"/>
+              <a:rPr lang="en-US"/>
               <a:t>Fifth level</a:t>
             </a:r>
-            <a:endParaRPr lang="en-US"/>
           </a:p>
         </p:txBody>
       </p:sp>
@@ -1303,38 +1308,37 @@
           <a:p>
             <a:pPr lvl="0"/>
             <a:r>
-              <a:rPr lang="en-US" smtClean="0"/>
+              <a:rPr lang="en-US"/>
               <a:t>Click to edit Master text styles</a:t>
             </a:r>
           </a:p>
           <a:p>
             <a:pPr lvl="1"/>
             <a:r>
-              <a:rPr lang="en-US" smtClean="0"/>
+              <a:rPr lang="en-US"/>
               <a:t>Second level</a:t>
             </a:r>
           </a:p>
           <a:p>
             <a:pPr lvl="2"/>
             <a:r>
-              <a:rPr lang="en-US" smtClean="0"/>
+              <a:rPr lang="en-US"/>
               <a:t>Third level</a:t>
             </a:r>
           </a:p>
           <a:p>
             <a:pPr lvl="3"/>
             <a:r>
-              <a:rPr lang="en-US" smtClean="0"/>
+              <a:rPr lang="en-US"/>
               <a:t>Fourth level</a:t>
             </a:r>
           </a:p>
           <a:p>
             <a:pPr lvl="4"/>
             <a:r>
-              <a:rPr lang="en-US" smtClean="0"/>
+              <a:rPr lang="en-US"/>
               <a:t>Fifth level</a:t>
             </a:r>
-            <a:endParaRPr lang="en-US"/>
           </a:p>
         </p:txBody>
       </p:sp>
@@ -1355,7 +1359,7 @@
           <a:p>
             <a:fld id="{5BCAD085-E8A6-8845-BD4E-CB4CCA059FC4}" type="datetimeFigureOut">
               <a:rPr lang="en-US" smtClean="0"/>
-              <a:t>1/27/13</a:t>
+              <a:t>4/28/2026</a:t>
             </a:fld>
             <a:endParaRPr lang="en-US"/>
           </a:p>
@@ -1453,10 +1457,9 @@
           </a:lstStyle>
           <a:p>
             <a:r>
-              <a:rPr lang="en-US" smtClean="0"/>
+              <a:rPr lang="en-US"/>
               <a:t>Click to edit Master title style</a:t>
             </a:r>
-            <a:endParaRPr lang="en-US"/>
           </a:p>
         </p:txBody>
       </p:sp>
@@ -1519,7 +1522,7 @@
           <a:p>
             <a:pPr lvl="0"/>
             <a:r>
-              <a:rPr lang="en-US" smtClean="0"/>
+              <a:rPr lang="en-US"/>
               <a:t>Click to edit Master text styles</a:t>
             </a:r>
           </a:p>
@@ -1575,38 +1578,37 @@
           <a:p>
             <a:pPr lvl="0"/>
             <a:r>
-              <a:rPr lang="en-US" smtClean="0"/>
+              <a:rPr lang="en-US"/>
               <a:t>Click to edit Master text styles</a:t>
             </a:r>
           </a:p>
           <a:p>
             <a:pPr lvl="1"/>
             <a:r>
-              <a:rPr lang="en-US" smtClean="0"/>
+              <a:rPr lang="en-US"/>
               <a:t>Second level</a:t>
             </a:r>
           </a:p>
           <a:p>
             <a:pPr lvl="2"/>
             <a:r>
-              <a:rPr lang="en-US" smtClean="0"/>
+              <a:rPr lang="en-US"/>
               <a:t>Third level</a:t>
             </a:r>
           </a:p>
           <a:p>
             <a:pPr lvl="3"/>
             <a:r>
-              <a:rPr lang="en-US" smtClean="0"/>
+              <a:rPr lang="en-US"/>
               <a:t>Fourth level</a:t>
             </a:r>
           </a:p>
           <a:p>
             <a:pPr lvl="4"/>
             <a:r>
-              <a:rPr lang="en-US" smtClean="0"/>
+              <a:rPr lang="en-US"/>
               <a:t>Fifth level</a:t>
             </a:r>
-            <a:endParaRPr lang="en-US"/>
           </a:p>
         </p:txBody>
       </p:sp>
@@ -1669,7 +1671,7 @@
           <a:p>
             <a:pPr lvl="0"/>
             <a:r>
-              <a:rPr lang="en-US" smtClean="0"/>
+              <a:rPr lang="en-US"/>
               <a:t>Click to edit Master text styles</a:t>
             </a:r>
           </a:p>
@@ -1725,38 +1727,37 @@
           <a:p>
             <a:pPr lvl="0"/>
             <a:r>
-              <a:rPr lang="en-US" smtClean="0"/>
+              <a:rPr lang="en-US"/>
               <a:t>Click to edit Master text styles</a:t>
             </a:r>
           </a:p>
           <a:p>
             <a:pPr lvl="1"/>
             <a:r>
-              <a:rPr lang="en-US" smtClean="0"/>
+              <a:rPr lang="en-US"/>
               <a:t>Second level</a:t>
             </a:r>
           </a:p>
           <a:p>
             <a:pPr lvl="2"/>
             <a:r>
-              <a:rPr lang="en-US" smtClean="0"/>
+              <a:rPr lang="en-US"/>
               <a:t>Third level</a:t>
             </a:r>
           </a:p>
           <a:p>
             <a:pPr lvl="3"/>
             <a:r>
-              <a:rPr lang="en-US" smtClean="0"/>
+              <a:rPr lang="en-US"/>
               <a:t>Fourth level</a:t>
             </a:r>
           </a:p>
           <a:p>
             <a:pPr lvl="4"/>
             <a:r>
-              <a:rPr lang="en-US" smtClean="0"/>
+              <a:rPr lang="en-US"/>
               <a:t>Fifth level</a:t>
             </a:r>
-            <a:endParaRPr lang="en-US"/>
           </a:p>
         </p:txBody>
       </p:sp>
@@ -1777,7 +1778,7 @@
           <a:p>
             <a:fld id="{5BCAD085-E8A6-8845-BD4E-CB4CCA059FC4}" type="datetimeFigureOut">
               <a:rPr lang="en-US" smtClean="0"/>
-              <a:t>1/27/13</a:t>
+              <a:t>4/28/2026</a:t>
             </a:fld>
             <a:endParaRPr lang="en-US"/>
           </a:p>
@@ -1871,10 +1872,9 @@
           <a:lstStyle/>
           <a:p>
             <a:r>
-              <a:rPr lang="en-US" smtClean="0"/>
+              <a:rPr lang="en-US"/>
               <a:t>Click to edit Master title style</a:t>
             </a:r>
-            <a:endParaRPr lang="en-US"/>
           </a:p>
         </p:txBody>
       </p:sp>
@@ -1895,7 +1895,7 @@
           <a:p>
             <a:fld id="{5BCAD085-E8A6-8845-BD4E-CB4CCA059FC4}" type="datetimeFigureOut">
               <a:rPr lang="en-US" smtClean="0"/>
-              <a:t>1/27/13</a:t>
+              <a:t>4/28/2026</a:t>
             </a:fld>
             <a:endParaRPr lang="en-US"/>
           </a:p>
@@ -1990,7 +1990,7 @@
           <a:p>
             <a:fld id="{5BCAD085-E8A6-8845-BD4E-CB4CCA059FC4}" type="datetimeFigureOut">
               <a:rPr lang="en-US" smtClean="0"/>
-              <a:t>1/27/13</a:t>
+              <a:t>4/28/2026</a:t>
             </a:fld>
             <a:endParaRPr lang="en-US"/>
           </a:p>
@@ -2093,10 +2093,9 @@
           </a:lstStyle>
           <a:p>
             <a:r>
-              <a:rPr lang="en-US" smtClean="0"/>
+              <a:rPr lang="en-US"/>
               <a:t>Click to edit Master title style</a:t>
             </a:r>
-            <a:endParaRPr lang="en-US"/>
           </a:p>
         </p:txBody>
       </p:sp>
@@ -2150,38 +2149,37 @@
           <a:p>
             <a:pPr lvl="0"/>
             <a:r>
-              <a:rPr lang="en-US" smtClean="0"/>
+              <a:rPr lang="en-US"/>
               <a:t>Click to edit Master text styles</a:t>
             </a:r>
           </a:p>
           <a:p>
             <a:pPr lvl="1"/>
             <a:r>
-              <a:rPr lang="en-US" smtClean="0"/>
+              <a:rPr lang="en-US"/>
               <a:t>Second level</a:t>
             </a:r>
           </a:p>
           <a:p>
             <a:pPr lvl="2"/>
             <a:r>
-              <a:rPr lang="en-US" smtClean="0"/>
+              <a:rPr lang="en-US"/>
               <a:t>Third level</a:t>
             </a:r>
           </a:p>
           <a:p>
             <a:pPr lvl="3"/>
             <a:r>
-              <a:rPr lang="en-US" smtClean="0"/>
+              <a:rPr lang="en-US"/>
               <a:t>Fourth level</a:t>
             </a:r>
           </a:p>
           <a:p>
             <a:pPr lvl="4"/>
             <a:r>
-              <a:rPr lang="en-US" smtClean="0"/>
+              <a:rPr lang="en-US"/>
               <a:t>Fifth level</a:t>
             </a:r>
-            <a:endParaRPr lang="en-US"/>
           </a:p>
         </p:txBody>
       </p:sp>
@@ -2244,7 +2242,7 @@
           <a:p>
             <a:pPr lvl="0"/>
             <a:r>
-              <a:rPr lang="en-US" smtClean="0"/>
+              <a:rPr lang="en-US"/>
               <a:t>Click to edit Master text styles</a:t>
             </a:r>
           </a:p>
@@ -2267,7 +2265,7 @@
           <a:p>
             <a:fld id="{5BCAD085-E8A6-8845-BD4E-CB4CCA059FC4}" type="datetimeFigureOut">
               <a:rPr lang="en-US" smtClean="0"/>
-              <a:t>1/27/13</a:t>
+              <a:t>4/28/2026</a:t>
             </a:fld>
             <a:endParaRPr lang="en-US"/>
           </a:p>
@@ -2370,10 +2368,9 @@
           </a:lstStyle>
           <a:p>
             <a:r>
-              <a:rPr lang="en-US" smtClean="0"/>
+              <a:rPr lang="en-US"/>
               <a:t>Click to edit Master title style</a:t>
             </a:r>
-            <a:endParaRPr lang="en-US"/>
           </a:p>
         </p:txBody>
       </p:sp>
@@ -2497,7 +2494,7 @@
           <a:p>
             <a:pPr lvl="0"/>
             <a:r>
-              <a:rPr lang="en-US" smtClean="0"/>
+              <a:rPr lang="en-US"/>
               <a:t>Click to edit Master text styles</a:t>
             </a:r>
           </a:p>
@@ -2520,7 +2517,7 @@
           <a:p>
             <a:fld id="{5BCAD085-E8A6-8845-BD4E-CB4CCA059FC4}" type="datetimeFigureOut">
               <a:rPr lang="en-US" smtClean="0"/>
-              <a:t>1/27/13</a:t>
+              <a:t>4/28/2026</a:t>
             </a:fld>
             <a:endParaRPr lang="en-US"/>
           </a:p>
@@ -2629,10 +2626,9 @@
           <a:lstStyle/>
           <a:p>
             <a:r>
-              <a:rPr lang="en-US" smtClean="0"/>
+              <a:rPr lang="en-US"/>
               <a:t>Click to edit Master title style</a:t>
             </a:r>
-            <a:endParaRPr lang="en-US"/>
           </a:p>
         </p:txBody>
       </p:sp>
@@ -2663,38 +2659,37 @@
           <a:p>
             <a:pPr lvl="0"/>
             <a:r>
-              <a:rPr lang="en-US" smtClean="0"/>
+              <a:rPr lang="en-US"/>
               <a:t>Click to edit Master text styles</a:t>
             </a:r>
           </a:p>
           <a:p>
             <a:pPr lvl="1"/>
             <a:r>
-              <a:rPr lang="en-US" smtClean="0"/>
+              <a:rPr lang="en-US"/>
               <a:t>Second level</a:t>
             </a:r>
           </a:p>
           <a:p>
             <a:pPr lvl="2"/>
             <a:r>
-              <a:rPr lang="en-US" smtClean="0"/>
+              <a:rPr lang="en-US"/>
               <a:t>Third level</a:t>
             </a:r>
           </a:p>
           <a:p>
             <a:pPr lvl="3"/>
             <a:r>
-              <a:rPr lang="en-US" smtClean="0"/>
+              <a:rPr lang="en-US"/>
               <a:t>Fourth level</a:t>
             </a:r>
           </a:p>
           <a:p>
             <a:pPr lvl="4"/>
             <a:r>
-              <a:rPr lang="en-US" smtClean="0"/>
+              <a:rPr lang="en-US"/>
               <a:t>Fifth level</a:t>
             </a:r>
-            <a:endParaRPr lang="en-US"/>
           </a:p>
         </p:txBody>
       </p:sp>
@@ -2733,7 +2728,7 @@
           <a:p>
             <a:fld id="{5BCAD085-E8A6-8845-BD4E-CB4CCA059FC4}" type="datetimeFigureOut">
               <a:rPr lang="en-US" smtClean="0"/>
-              <a:t>1/27/13</a:t>
+              <a:t>4/28/2026</a:t>
             </a:fld>
             <a:endParaRPr lang="en-US"/>
           </a:p>
@@ -3092,7 +3087,7 @@
 </file>
 
 <file path=ppt/slides/slide1.xml><?xml version="1.0" encoding="utf-8"?>
-<p:sld xmlns:a="http://schemas.openxmlformats.org/drawingml/2006/main" xmlns:p="http://schemas.openxmlformats.org/presentationml/2006/main" xmlns:r="http://schemas.openxmlformats.org/officeDocument/2006/relationships">
+<p:sld xmlns:a="http://schemas.openxmlformats.org/drawingml/2006/main" xmlns:r="http://schemas.openxmlformats.org/officeDocument/2006/relationships" xmlns:p="http://schemas.openxmlformats.org/presentationml/2006/main">
   <p:cSld>
     <p:spTree>
       <p:nvGrpSpPr>
@@ -3100,7 +3095,14 @@
         <p:cNvGrpSpPr/>
         <p:nvPr/>
       </p:nvGrpSpPr>
-      <p:grpSpPr/>
+      <p:grpSpPr>
+        <a:xfrm>
+          <a:off x="0" y="0"/>
+          <a:ext cx="0" cy="0"/>
+          <a:chOff x="0" y="0"/>
+          <a:chExt cx="0" cy="0"/>
+        </a:xfrm>
+      </p:grpSpPr>
       <p:sp>
         <p:nvSpPr>
           <p:cNvPr id="2" name="Title 1"/>
@@ -3152,7 +3154,7 @@
 </file>
 
 <file path=ppt/slides/slide10.xml><?xml version="1.0" encoding="utf-8"?>
-<p:sld xmlns:a="http://schemas.openxmlformats.org/drawingml/2006/main" xmlns:p="http://schemas.openxmlformats.org/presentationml/2006/main" xmlns:r="http://schemas.openxmlformats.org/officeDocument/2006/relationships">
+<p:sld xmlns:a="http://schemas.openxmlformats.org/drawingml/2006/main" xmlns:r="http://schemas.openxmlformats.org/officeDocument/2006/relationships" xmlns:p="http://schemas.openxmlformats.org/presentationml/2006/main">
   <p:cSld>
     <p:spTree>
       <p:nvGrpSpPr>
@@ -3160,7 +3162,14 @@
         <p:cNvGrpSpPr/>
         <p:nvPr/>
       </p:nvGrpSpPr>
-      <p:grpSpPr/>
+      <p:grpSpPr>
+        <a:xfrm>
+          <a:off x="0" y="0"/>
+          <a:ext cx="0" cy="0"/>
+          <a:chOff x="0" y="0"/>
+          <a:chExt cx="0" cy="0"/>
+        </a:xfrm>
+      </p:grpSpPr>
       <p:sp>
         <p:nvSpPr>
           <p:cNvPr id="2" name="Title 1"/>
@@ -3227,7 +3236,7 @@
 </file>
 
 <file path=ppt/slides/slide11.xml><?xml version="1.0" encoding="utf-8"?>
-<p:sld xmlns:a="http://schemas.openxmlformats.org/drawingml/2006/main" xmlns:p="http://schemas.openxmlformats.org/presentationml/2006/main" xmlns:r="http://schemas.openxmlformats.org/officeDocument/2006/relationships">
+<p:sld xmlns:a="http://schemas.openxmlformats.org/drawingml/2006/main" xmlns:r="http://schemas.openxmlformats.org/officeDocument/2006/relationships" xmlns:p="http://schemas.openxmlformats.org/presentationml/2006/main">
   <p:cSld>
     <p:spTree>
       <p:nvGrpSpPr>
@@ -3235,7 +3244,14 @@
         <p:cNvGrpSpPr/>
         <p:nvPr/>
       </p:nvGrpSpPr>
-      <p:grpSpPr/>
+      <p:grpSpPr>
+        <a:xfrm>
+          <a:off x="0" y="0"/>
+          <a:ext cx="0" cy="0"/>
+          <a:chOff x="0" y="0"/>
+          <a:chExt cx="0" cy="0"/>
+        </a:xfrm>
+      </p:grpSpPr>
       <p:sp>
         <p:nvSpPr>
           <p:cNvPr id="2" name="Title 1"/>
@@ -3273,31 +3289,65 @@
           <a:lstStyle/>
           <a:p>
             <a:r>
-              <a:t>Compared MICE, KNN, and MissForest</a:t>
-            </a:r>
-          </a:p>
-          <a:p>
-            <a:r>
-              <a:t>Metrics below use RandomForest + macro F1</a:t>
-            </a:r>
-          </a:p>
-          <a:p>
-            <a:r>
-              <a:t>MICE: F1-macro=1.000</a:t>
-            </a:r>
-          </a:p>
-          <a:p>
-            <a:r>
-              <a:t>KNN: F1-macro=1.000</a:t>
-            </a:r>
-          </a:p>
-          <a:p>
-            <a:r>
-              <a:t>MissForest: F1-macro=1.000</a:t>
-            </a:r>
-          </a:p>
-        </p:txBody>
-      </p:sp>
+              <a:rPr dirty="0"/>
+              <a:t>Compared MICE, KNN, and </a:t>
+            </a:r>
+            <a:r>
+              <a:rPr dirty="0" err="1"/>
+              <a:t>MissForest</a:t>
+            </a:r>
+            <a:endParaRPr dirty="0"/>
+          </a:p>
+          <a:p>
+            <a:r>
+              <a:rPr dirty="0"/>
+              <a:t>Metrics below use </a:t>
+            </a:r>
+            <a:r>
+              <a:rPr dirty="0" err="1"/>
+              <a:t>RandomForest</a:t>
+            </a:r>
+            <a:r>
+              <a:rPr dirty="0"/>
+              <a:t> + macro F1</a:t>
+            </a:r>
+            <a:endParaRPr lang="en-US" dirty="0"/>
+          </a:p>
+          <a:p>
+            <a:endParaRPr dirty="0"/>
+          </a:p>
+        </p:txBody>
+      </p:sp>
+      <p:pic>
+        <p:nvPicPr>
+          <p:cNvPr id="5" name="Picture 4">
+            <a:extLst>
+              <a:ext uri="{FF2B5EF4-FFF2-40B4-BE49-F238E27FC236}">
+                <a16:creationId xmlns:a16="http://schemas.microsoft.com/office/drawing/2014/main" id="{96CEA3B9-14D9-2955-AB2B-4CE91F0F1078}"/>
+              </a:ext>
+            </a:extLst>
+          </p:cNvPr>
+          <p:cNvPicPr>
+            <a:picLocks noChangeAspect="1"/>
+          </p:cNvPicPr>
+          <p:nvPr/>
+        </p:nvPicPr>
+        <p:blipFill>
+          <a:blip r:embed="rId2"/>
+          <a:stretch>
+            <a:fillRect/>
+          </a:stretch>
+        </p:blipFill>
+        <p:spPr>
+          <a:xfrm>
+            <a:off x="1609311" y="3305460"/>
+            <a:ext cx="5925377" cy="2267266"/>
+          </a:xfrm>
+          <a:prstGeom prst="rect">
+            <a:avLst/>
+          </a:prstGeom>
+        </p:spPr>
+      </p:pic>
     </p:spTree>
   </p:cSld>
   <p:clrMapOvr>
@@ -3307,7 +3357,7 @@
 </file>
 
 <file path=ppt/slides/slide12.xml><?xml version="1.0" encoding="utf-8"?>
-<p:sld xmlns:a="http://schemas.openxmlformats.org/drawingml/2006/main" xmlns:p="http://schemas.openxmlformats.org/presentationml/2006/main" xmlns:r="http://schemas.openxmlformats.org/officeDocument/2006/relationships">
+<p:sld xmlns:a="http://schemas.openxmlformats.org/drawingml/2006/main" xmlns:r="http://schemas.openxmlformats.org/officeDocument/2006/relationships" xmlns:p="http://schemas.openxmlformats.org/presentationml/2006/main">
   <p:cSld>
     <p:spTree>
       <p:nvGrpSpPr>
@@ -3315,7 +3365,14 @@
         <p:cNvGrpSpPr/>
         <p:nvPr/>
       </p:nvGrpSpPr>
-      <p:grpSpPr/>
+      <p:grpSpPr>
+        <a:xfrm>
+          <a:off x="0" y="0"/>
+          <a:ext cx="0" cy="0"/>
+          <a:chOff x="0" y="0"/>
+          <a:chExt cx="0" cy="0"/>
+        </a:xfrm>
+      </p:grpSpPr>
       <p:sp>
         <p:nvSpPr>
           <p:cNvPr id="2" name="Title 1"/>
@@ -3353,36 +3410,49 @@
           <a:lstStyle/>
           <a:p>
             <a:r>
+              <a:rPr dirty="0"/>
               <a:t>Compared baseline, ENN, SMOTE, SMOTEENN</a:t>
             </a:r>
-          </a:p>
-          <a:p>
-            <a:r>
-              <a:t>Macro F1 used to handle class imbalance</a:t>
-            </a:r>
-          </a:p>
-          <a:p>
-            <a:r>
-              <a:t>baseline: F1-macro=1.000</a:t>
-            </a:r>
-          </a:p>
-          <a:p>
-            <a:r>
-              <a:t>ENN (Under-sampling): F1-macro=1.000</a:t>
-            </a:r>
-          </a:p>
-          <a:p>
-            <a:r>
-              <a:t>SMOTE (Over-sampling): F1-macro=1.000</a:t>
-            </a:r>
-          </a:p>
-          <a:p>
-            <a:r>
-              <a:t>SMOTEENN (Combined): F1-macro=1.000</a:t>
-            </a:r>
-          </a:p>
-        </p:txBody>
-      </p:sp>
+            <a:endParaRPr lang="es-ES" dirty="0"/>
+          </a:p>
+          <a:p>
+            <a:pPr marL="0" indent="0">
+              <a:buNone/>
+            </a:pPr>
+            <a:endParaRPr lang="es-ES" dirty="0"/>
+          </a:p>
+        </p:txBody>
+      </p:sp>
+      <p:pic>
+        <p:nvPicPr>
+          <p:cNvPr id="5" name="Picture 4">
+            <a:extLst>
+              <a:ext uri="{FF2B5EF4-FFF2-40B4-BE49-F238E27FC236}">
+                <a16:creationId xmlns:a16="http://schemas.microsoft.com/office/drawing/2014/main" id="{859A866D-70BB-53E3-0420-351BC2F6566B}"/>
+              </a:ext>
+            </a:extLst>
+          </p:cNvPr>
+          <p:cNvPicPr>
+            <a:picLocks noChangeAspect="1"/>
+          </p:cNvPicPr>
+          <p:nvPr/>
+        </p:nvPicPr>
+        <p:blipFill>
+          <a:blip r:embed="rId2"/>
+          <a:stretch>
+            <a:fillRect/>
+          </a:stretch>
+        </p:blipFill>
+        <p:spPr>
+          <a:xfrm>
+            <a:off x="805657" y="3034298"/>
+            <a:ext cx="7649643" cy="2724530"/>
+          </a:xfrm>
+          <a:prstGeom prst="rect">
+            <a:avLst/>
+          </a:prstGeom>
+        </p:spPr>
+      </p:pic>
     </p:spTree>
   </p:cSld>
   <p:clrMapOvr>
@@ -3392,7 +3462,7 @@
 </file>
 
 <file path=ppt/slides/slide13.xml><?xml version="1.0" encoding="utf-8"?>
-<p:sld xmlns:a="http://schemas.openxmlformats.org/drawingml/2006/main" xmlns:p="http://schemas.openxmlformats.org/presentationml/2006/main" xmlns:r="http://schemas.openxmlformats.org/officeDocument/2006/relationships">
+<p:sld xmlns:a="http://schemas.openxmlformats.org/drawingml/2006/main" xmlns:r="http://schemas.openxmlformats.org/officeDocument/2006/relationships" xmlns:p="http://schemas.openxmlformats.org/presentationml/2006/main">
   <p:cSld>
     <p:spTree>
       <p:nvGrpSpPr>
@@ -3400,7 +3470,14 @@
         <p:cNvGrpSpPr/>
         <p:nvPr/>
       </p:nvGrpSpPr>
-      <p:grpSpPr/>
+      <p:grpSpPr>
+        <a:xfrm>
+          <a:off x="0" y="0"/>
+          <a:ext cx="0" cy="0"/>
+          <a:chOff x="0" y="0"/>
+          <a:chExt cx="0" cy="0"/>
+        </a:xfrm>
+      </p:grpSpPr>
       <p:sp>
         <p:nvSpPr>
           <p:cNvPr id="2" name="Title 1"/>
@@ -3438,26 +3515,50 @@
           <a:lstStyle/>
           <a:p>
             <a:r>
-              <a:t>Softmax Logistic Regression vs One-vs-Rest vs One-vs-One</a:t>
-            </a:r>
-          </a:p>
-          <a:p>
-            <a:r>
-              <a:t>Softmax: Accuracy=1.000</a:t>
-            </a:r>
-          </a:p>
-          <a:p>
-            <a:r>
-              <a:t>One-vs-Rest: Accuracy=1.000</a:t>
-            </a:r>
-          </a:p>
-          <a:p>
-            <a:r>
-              <a:t>One-vs-One: Accuracy=1.000</a:t>
-            </a:r>
-          </a:p>
-        </p:txBody>
-      </p:sp>
+              <a:rPr dirty="0" err="1"/>
+              <a:t>Softmax</a:t>
+            </a:r>
+            <a:r>
+              <a:rPr dirty="0"/>
+              <a:t> Logistic Regression vs One-vs-Rest vs One-vs-One</a:t>
+            </a:r>
+            <a:endParaRPr lang="en-US" dirty="0"/>
+          </a:p>
+          <a:p>
+            <a:endParaRPr dirty="0"/>
+          </a:p>
+        </p:txBody>
+      </p:sp>
+      <p:pic>
+        <p:nvPicPr>
+          <p:cNvPr id="5" name="Picture 4">
+            <a:extLst>
+              <a:ext uri="{FF2B5EF4-FFF2-40B4-BE49-F238E27FC236}">
+                <a16:creationId xmlns:a16="http://schemas.microsoft.com/office/drawing/2014/main" id="{30B38E16-2CB4-99C9-C531-B5D70B00027D}"/>
+              </a:ext>
+            </a:extLst>
+          </p:cNvPr>
+          <p:cNvPicPr>
+            <a:picLocks noChangeAspect="1"/>
+          </p:cNvPicPr>
+          <p:nvPr/>
+        </p:nvPicPr>
+        <p:blipFill>
+          <a:blip r:embed="rId2"/>
+          <a:stretch>
+            <a:fillRect/>
+          </a:stretch>
+        </p:blipFill>
+        <p:spPr>
+          <a:xfrm>
+            <a:off x="1560358" y="3202791"/>
+            <a:ext cx="5906324" cy="2238687"/>
+          </a:xfrm>
+          <a:prstGeom prst="rect">
+            <a:avLst/>
+          </a:prstGeom>
+        </p:spPr>
+      </p:pic>
     </p:spTree>
   </p:cSld>
   <p:clrMapOvr>
@@ -3467,7 +3568,7 @@
 </file>
 
 <file path=ppt/slides/slide14.xml><?xml version="1.0" encoding="utf-8"?>
-<p:sld xmlns:a="http://schemas.openxmlformats.org/drawingml/2006/main" xmlns:p="http://schemas.openxmlformats.org/presentationml/2006/main" xmlns:r="http://schemas.openxmlformats.org/officeDocument/2006/relationships">
+<p:sld xmlns:a="http://schemas.openxmlformats.org/drawingml/2006/main" xmlns:r="http://schemas.openxmlformats.org/officeDocument/2006/relationships" xmlns:p="http://schemas.openxmlformats.org/presentationml/2006/main">
   <p:cSld>
     <p:spTree>
       <p:nvGrpSpPr>
@@ -3475,7 +3576,14 @@
         <p:cNvGrpSpPr/>
         <p:nvPr/>
       </p:nvGrpSpPr>
-      <p:grpSpPr/>
+      <p:grpSpPr>
+        <a:xfrm>
+          <a:off x="0" y="0"/>
+          <a:ext cx="0" cy="0"/>
+          <a:chOff x="0" y="0"/>
+          <a:chExt cx="0" cy="0"/>
+        </a:xfrm>
+      </p:grpSpPr>
       <p:sp>
         <p:nvSpPr>
           <p:cNvPr id="2" name="Title 1"/>
@@ -3537,7 +3645,7 @@
 </file>
 
 <file path=ppt/slides/slide2.xml><?xml version="1.0" encoding="utf-8"?>
-<p:sld xmlns:a="http://schemas.openxmlformats.org/drawingml/2006/main" xmlns:p="http://schemas.openxmlformats.org/presentationml/2006/main" xmlns:r="http://schemas.openxmlformats.org/officeDocument/2006/relationships">
+<p:sld xmlns:a="http://schemas.openxmlformats.org/drawingml/2006/main" xmlns:r="http://schemas.openxmlformats.org/officeDocument/2006/relationships" xmlns:p="http://schemas.openxmlformats.org/presentationml/2006/main">
   <p:cSld>
     <p:spTree>
       <p:nvGrpSpPr>
@@ -3545,7 +3653,14 @@
         <p:cNvGrpSpPr/>
         <p:nvPr/>
       </p:nvGrpSpPr>
-      <p:grpSpPr/>
+      <p:grpSpPr>
+        <a:xfrm>
+          <a:off x="0" y="0"/>
+          <a:ext cx="0" cy="0"/>
+          <a:chOff x="0" y="0"/>
+          <a:chExt cx="0" cy="0"/>
+        </a:xfrm>
+      </p:grpSpPr>
       <p:sp>
         <p:nvSpPr>
           <p:cNvPr id="2" name="Title 1"/>
@@ -3607,7 +3722,7 @@
 </file>
 
 <file path=ppt/slides/slide3.xml><?xml version="1.0" encoding="utf-8"?>
-<p:sld xmlns:a="http://schemas.openxmlformats.org/drawingml/2006/main" xmlns:p="http://schemas.openxmlformats.org/presentationml/2006/main" xmlns:r="http://schemas.openxmlformats.org/officeDocument/2006/relationships">
+<p:sld xmlns:a="http://schemas.openxmlformats.org/drawingml/2006/main" xmlns:r="http://schemas.openxmlformats.org/officeDocument/2006/relationships" xmlns:p="http://schemas.openxmlformats.org/presentationml/2006/main">
   <p:cSld>
     <p:spTree>
       <p:nvGrpSpPr>
@@ -3615,7 +3730,14 @@
         <p:cNvGrpSpPr/>
         <p:nvPr/>
       </p:nvGrpSpPr>
-      <p:grpSpPr/>
+      <p:grpSpPr>
+        <a:xfrm>
+          <a:off x="0" y="0"/>
+          <a:ext cx="0" cy="0"/>
+          <a:chOff x="0" y="0"/>
+          <a:chExt cx="0" cy="0"/>
+        </a:xfrm>
+      </p:grpSpPr>
       <p:sp>
         <p:nvSpPr>
           <p:cNvPr id="2" name="Title 1"/>
@@ -3682,7 +3804,7 @@
 </file>
 
 <file path=ppt/slides/slide4.xml><?xml version="1.0" encoding="utf-8"?>
-<p:sld xmlns:a="http://schemas.openxmlformats.org/drawingml/2006/main" xmlns:p="http://schemas.openxmlformats.org/presentationml/2006/main" xmlns:r="http://schemas.openxmlformats.org/officeDocument/2006/relationships">
+<p:sld xmlns:a="http://schemas.openxmlformats.org/drawingml/2006/main" xmlns:r="http://schemas.openxmlformats.org/officeDocument/2006/relationships" xmlns:p="http://schemas.openxmlformats.org/presentationml/2006/main">
   <p:cSld>
     <p:spTree>
       <p:nvGrpSpPr>
@@ -3690,7 +3812,14 @@
         <p:cNvGrpSpPr/>
         <p:nvPr/>
       </p:nvGrpSpPr>
-      <p:grpSpPr/>
+      <p:grpSpPr>
+        <a:xfrm>
+          <a:off x="0" y="0"/>
+          <a:ext cx="0" cy="0"/>
+          <a:chOff x="0" y="0"/>
+          <a:chExt cx="0" cy="0"/>
+        </a:xfrm>
+      </p:grpSpPr>
       <p:sp>
         <p:nvSpPr>
           <p:cNvPr id="2" name="Title 1"/>
@@ -3745,7 +3874,7 @@
 </file>
 
 <file path=ppt/slides/slide5.xml><?xml version="1.0" encoding="utf-8"?>
-<p:sld xmlns:a="http://schemas.openxmlformats.org/drawingml/2006/main" xmlns:p="http://schemas.openxmlformats.org/presentationml/2006/main" xmlns:r="http://schemas.openxmlformats.org/officeDocument/2006/relationships">
+<p:sld xmlns:a="http://schemas.openxmlformats.org/drawingml/2006/main" xmlns:r="http://schemas.openxmlformats.org/officeDocument/2006/relationships" xmlns:p="http://schemas.openxmlformats.org/presentationml/2006/main">
   <p:cSld>
     <p:spTree>
       <p:nvGrpSpPr>
@@ -3753,7 +3882,14 @@
         <p:cNvGrpSpPr/>
         <p:nvPr/>
       </p:nvGrpSpPr>
-      <p:grpSpPr/>
+      <p:grpSpPr>
+        <a:xfrm>
+          <a:off x="0" y="0"/>
+          <a:ext cx="0" cy="0"/>
+          <a:chOff x="0" y="0"/>
+          <a:chExt cx="0" cy="0"/>
+        </a:xfrm>
+      </p:grpSpPr>
       <p:sp>
         <p:nvSpPr>
           <p:cNvPr id="2" name="Title 1"/>
@@ -3808,7 +3944,7 @@
 </file>
 
 <file path=ppt/slides/slide6.xml><?xml version="1.0" encoding="utf-8"?>
-<p:sld xmlns:a="http://schemas.openxmlformats.org/drawingml/2006/main" xmlns:p="http://schemas.openxmlformats.org/presentationml/2006/main" xmlns:r="http://schemas.openxmlformats.org/officeDocument/2006/relationships">
+<p:sld xmlns:a="http://schemas.openxmlformats.org/drawingml/2006/main" xmlns:r="http://schemas.openxmlformats.org/officeDocument/2006/relationships" xmlns:p="http://schemas.openxmlformats.org/presentationml/2006/main">
   <p:cSld>
     <p:spTree>
       <p:nvGrpSpPr>
@@ -3816,7 +3952,14 @@
         <p:cNvGrpSpPr/>
         <p:nvPr/>
       </p:nvGrpSpPr>
-      <p:grpSpPr/>
+      <p:grpSpPr>
+        <a:xfrm>
+          <a:off x="0" y="0"/>
+          <a:ext cx="0" cy="0"/>
+          <a:chOff x="0" y="0"/>
+          <a:chExt cx="0" cy="0"/>
+        </a:xfrm>
+      </p:grpSpPr>
       <p:sp>
         <p:nvSpPr>
           <p:cNvPr id="2" name="Title 1"/>
@@ -3871,7 +4014,7 @@
 </file>
 
 <file path=ppt/slides/slide7.xml><?xml version="1.0" encoding="utf-8"?>
-<p:sld xmlns:a="http://schemas.openxmlformats.org/drawingml/2006/main" xmlns:p="http://schemas.openxmlformats.org/presentationml/2006/main" xmlns:r="http://schemas.openxmlformats.org/officeDocument/2006/relationships">
+<p:sld xmlns:a="http://schemas.openxmlformats.org/drawingml/2006/main" xmlns:r="http://schemas.openxmlformats.org/officeDocument/2006/relationships" xmlns:p="http://schemas.openxmlformats.org/presentationml/2006/main">
   <p:cSld>
     <p:spTree>
       <p:nvGrpSpPr>
@@ -3879,7 +4022,14 @@
         <p:cNvGrpSpPr/>
         <p:nvPr/>
       </p:nvGrpSpPr>
-      <p:grpSpPr/>
+      <p:grpSpPr>
+        <a:xfrm>
+          <a:off x="0" y="0"/>
+          <a:ext cx="0" cy="0"/>
+          <a:chOff x="0" y="0"/>
+          <a:chExt cx="0" cy="0"/>
+        </a:xfrm>
+      </p:grpSpPr>
       <p:sp>
         <p:nvSpPr>
           <p:cNvPr id="2" name="Title 1"/>
@@ -3934,7 +4084,7 @@
 </file>
 
 <file path=ppt/slides/slide8.xml><?xml version="1.0" encoding="utf-8"?>
-<p:sld xmlns:a="http://schemas.openxmlformats.org/drawingml/2006/main" xmlns:p="http://schemas.openxmlformats.org/presentationml/2006/main" xmlns:r="http://schemas.openxmlformats.org/officeDocument/2006/relationships">
+<p:sld xmlns:a="http://schemas.openxmlformats.org/drawingml/2006/main" xmlns:r="http://schemas.openxmlformats.org/officeDocument/2006/relationships" xmlns:p="http://schemas.openxmlformats.org/presentationml/2006/main">
   <p:cSld>
     <p:spTree>
       <p:nvGrpSpPr>
@@ -3942,7 +4092,14 @@
         <p:cNvGrpSpPr/>
         <p:nvPr/>
       </p:nvGrpSpPr>
-      <p:grpSpPr/>
+      <p:grpSpPr>
+        <a:xfrm>
+          <a:off x="0" y="0"/>
+          <a:ext cx="0" cy="0"/>
+          <a:chOff x="0" y="0"/>
+          <a:chExt cx="0" cy="0"/>
+        </a:xfrm>
+      </p:grpSpPr>
       <p:sp>
         <p:nvSpPr>
           <p:cNvPr id="2" name="Title 1"/>
@@ -3997,7 +4154,7 @@
 </file>
 
 <file path=ppt/slides/slide9.xml><?xml version="1.0" encoding="utf-8"?>
-<p:sld xmlns:a="http://schemas.openxmlformats.org/drawingml/2006/main" xmlns:p="http://schemas.openxmlformats.org/presentationml/2006/main" xmlns:r="http://schemas.openxmlformats.org/officeDocument/2006/relationships">
+<p:sld xmlns:a="http://schemas.openxmlformats.org/drawingml/2006/main" xmlns:r="http://schemas.openxmlformats.org/officeDocument/2006/relationships" xmlns:p="http://schemas.openxmlformats.org/presentationml/2006/main">
   <p:cSld>
     <p:spTree>
       <p:nvGrpSpPr>
@@ -4005,7 +4162,14 @@
         <p:cNvGrpSpPr/>
         <p:nvPr/>
       </p:nvGrpSpPr>
-      <p:grpSpPr/>
+      <p:grpSpPr>
+        <a:xfrm>
+          <a:off x="0" y="0"/>
+          <a:ext cx="0" cy="0"/>
+          <a:chOff x="0" y="0"/>
+          <a:chExt cx="0" cy="0"/>
+        </a:xfrm>
+      </p:grpSpPr>
       <p:sp>
         <p:nvSpPr>
           <p:cNvPr id="2" name="Title 1"/>

--- a/reports/Imbalanced_MC_Timeseries_Report_20260428_201112.pptx
+++ b/reports/Imbalanced_MC_Timeseries_Report_20260428_201112.pptx
@@ -11,14 +11,15 @@
     <p:sldId id="259" r:id="rId5"/>
     <p:sldId id="260" r:id="rId6"/>
     <p:sldId id="261" r:id="rId7"/>
-    <p:sldId id="262" r:id="rId8"/>
-    <p:sldId id="263" r:id="rId9"/>
-    <p:sldId id="264" r:id="rId10"/>
-    <p:sldId id="265" r:id="rId11"/>
-    <p:sldId id="266" r:id="rId12"/>
-    <p:sldId id="267" r:id="rId13"/>
-    <p:sldId id="268" r:id="rId14"/>
-    <p:sldId id="269" r:id="rId15"/>
+    <p:sldId id="263" r:id="rId8"/>
+    <p:sldId id="264" r:id="rId9"/>
+    <p:sldId id="262" r:id="rId10"/>
+    <p:sldId id="270" r:id="rId11"/>
+    <p:sldId id="265" r:id="rId12"/>
+    <p:sldId id="266" r:id="rId13"/>
+    <p:sldId id="267" r:id="rId14"/>
+    <p:sldId id="268" r:id="rId15"/>
+    <p:sldId id="269" r:id="rId16"/>
   </p:sldIdLst>
   <p:sldSz cx="9144000" cy="6858000" type="screen4x3"/>
   <p:notesSz cx="6858000" cy="9144000"/>
@@ -3156,6 +3157,14 @@
 <file path=ppt/slides/slide10.xml><?xml version="1.0" encoding="utf-8"?>
 <p:sld xmlns:a="http://schemas.openxmlformats.org/drawingml/2006/main" xmlns:r="http://schemas.openxmlformats.org/officeDocument/2006/relationships" xmlns:p="http://schemas.openxmlformats.org/presentationml/2006/main">
   <p:cSld>
+    <p:bg>
+      <p:bgPr>
+        <a:solidFill>
+          <a:schemeClr val="bg1"/>
+        </a:solidFill>
+        <a:effectLst/>
+      </p:bgPr>
+    </p:bg>
     <p:spTree>
       <p:nvGrpSpPr>
         <p:cNvPr id="1" name=""/>
@@ -3170,6 +3179,426 @@
           <a:chExt cx="0" cy="0"/>
         </a:xfrm>
       </p:grpSpPr>
+      <p:sp useBgFill="1">
+        <p:nvSpPr>
+          <p:cNvPr id="9" name="Rectangle 8">
+            <a:extLst>
+              <a:ext uri="{FF2B5EF4-FFF2-40B4-BE49-F238E27FC236}">
+                <a16:creationId xmlns:a16="http://schemas.microsoft.com/office/drawing/2014/main" id="{665DBBEF-238B-476B-96AB-8AAC3224ECEA}"/>
+              </a:ext>
+              <a:ext uri="{C183D7F6-B498-43B3-948B-1728B52AA6E4}">
+                <adec:decorative xmlns:adec="http://schemas.microsoft.com/office/drawing/2017/decorative" val="1"/>
+              </a:ext>
+            </a:extLst>
+          </p:cNvPr>
+          <p:cNvSpPr>
+            <a:spLocks noGrp="1" noRot="1" noChangeAspect="1" noMove="1" noResize="1" noEditPoints="1" noAdjustHandles="1" noChangeArrowheads="1" noChangeShapeType="1" noTextEdit="1"/>
+          </p:cNvSpPr>
+          <p:nvPr>
+            <p:extLst>
+              <p:ext uri="{386F3935-93C4-4BCD-93E2-E3B085C9AB24}">
+                <p16:designElem xmlns:p16="http://schemas.microsoft.com/office/powerpoint/2015/main" val="1"/>
+              </p:ext>
+            </p:extLst>
+          </p:nvPr>
+        </p:nvSpPr>
+        <p:spPr>
+          <a:xfrm>
+            <a:off x="0" y="0"/>
+            <a:ext cx="9144000" cy="6858000"/>
+          </a:xfrm>
+          <a:prstGeom prst="rect">
+            <a:avLst/>
+          </a:prstGeom>
+          <a:ln>
+            <a:noFill/>
+          </a:ln>
+        </p:spPr>
+        <p:style>
+          <a:lnRef idx="2">
+            <a:schemeClr val="accent1">
+              <a:shade val="50000"/>
+            </a:schemeClr>
+          </a:lnRef>
+          <a:fillRef idx="1">
+            <a:schemeClr val="accent1"/>
+          </a:fillRef>
+          <a:effectRef idx="0">
+            <a:schemeClr val="accent1"/>
+          </a:effectRef>
+          <a:fontRef idx="minor">
+            <a:schemeClr val="lt1"/>
+          </a:fontRef>
+        </p:style>
+        <p:txBody>
+          <a:bodyPr rtlCol="0" anchor="ctr"/>
+          <a:lstStyle/>
+          <a:p>
+            <a:pPr algn="ctr"/>
+            <a:endParaRPr lang="en-US"/>
+          </a:p>
+        </p:txBody>
+      </p:sp>
+      <p:sp>
+        <p:nvSpPr>
+          <p:cNvPr id="2" name="Title 1">
+            <a:extLst>
+              <a:ext uri="{FF2B5EF4-FFF2-40B4-BE49-F238E27FC236}">
+                <a16:creationId xmlns:a16="http://schemas.microsoft.com/office/drawing/2014/main" id="{D9928219-C380-52FF-B42A-8BD746630429}"/>
+              </a:ext>
+            </a:extLst>
+          </p:cNvPr>
+          <p:cNvSpPr>
+            <a:spLocks noGrp="1"/>
+          </p:cNvSpPr>
+          <p:nvPr>
+            <p:ph type="title"/>
+          </p:nvPr>
+        </p:nvSpPr>
+        <p:spPr>
+          <a:xfrm>
+            <a:off x="420682" y="639193"/>
+            <a:ext cx="2678858" cy="3573516"/>
+          </a:xfrm>
+        </p:spPr>
+        <p:txBody>
+          <a:bodyPr vert="horz" lIns="91440" tIns="45720" rIns="91440" bIns="45720" rtlCol="0" anchor="b">
+            <a:normAutofit/>
+          </a:bodyPr>
+          <a:lstStyle/>
+          <a:p>
+            <a:pPr algn="l" defTabSz="914400">
+              <a:lnSpc>
+                <a:spcPct val="90000"/>
+              </a:lnSpc>
+            </a:pPr>
+            <a:r>
+              <a:rPr lang="en-US" sz="4000" kern="1200" dirty="0">
+                <a:solidFill>
+                  <a:schemeClr val="tx1"/>
+                </a:solidFill>
+                <a:latin typeface="+mj-lt"/>
+                <a:ea typeface="+mj-ea"/>
+                <a:cs typeface="+mj-cs"/>
+              </a:rPr>
+              <a:t>Categorical Correlation</a:t>
+            </a:r>
+          </a:p>
+        </p:txBody>
+      </p:sp>
+      <p:sp>
+        <p:nvSpPr>
+          <p:cNvPr id="11" name="sketch line">
+            <a:extLst>
+              <a:ext uri="{FF2B5EF4-FFF2-40B4-BE49-F238E27FC236}">
+                <a16:creationId xmlns:a16="http://schemas.microsoft.com/office/drawing/2014/main" id="{3FCFB1DE-0B7E-48CC-BA90-B2AB0889F9D6}"/>
+              </a:ext>
+              <a:ext uri="{C183D7F6-B498-43B3-948B-1728B52AA6E4}">
+                <adec:decorative xmlns:adec="http://schemas.microsoft.com/office/drawing/2017/decorative" val="1"/>
+              </a:ext>
+            </a:extLst>
+          </p:cNvPr>
+          <p:cNvSpPr>
+            <a:spLocks noGrp="1" noRot="1" noChangeAspect="1" noMove="1" noResize="1" noEditPoints="1" noAdjustHandles="1" noChangeArrowheads="1" noChangeShapeType="1" noTextEdit="1"/>
+          </p:cNvSpPr>
+          <p:nvPr>
+            <p:extLst>
+              <p:ext uri="{386F3935-93C4-4BCD-93E2-E3B085C9AB24}">
+                <p16:designElem xmlns:p16="http://schemas.microsoft.com/office/powerpoint/2015/main" val="1"/>
+              </p:ext>
+            </p:extLst>
+          </p:nvPr>
+        </p:nvSpPr>
+        <p:spPr>
+          <a:xfrm>
+            <a:off x="482458" y="4409267"/>
+            <a:ext cx="2441321" cy="18288"/>
+          </a:xfrm>
+          <a:custGeom>
+            <a:avLst/>
+            <a:gdLst>
+              <a:gd name="csX0" fmla="*/ 0 w 2441321"/>
+              <a:gd name="csY0" fmla="*/ 0 h 18288"/>
+              <a:gd name="csX1" fmla="*/ 585917 w 2441321"/>
+              <a:gd name="csY1" fmla="*/ 0 h 18288"/>
+              <a:gd name="csX2" fmla="*/ 1196247 w 2441321"/>
+              <a:gd name="csY2" fmla="*/ 0 h 18288"/>
+              <a:gd name="csX3" fmla="*/ 1806578 w 2441321"/>
+              <a:gd name="csY3" fmla="*/ 0 h 18288"/>
+              <a:gd name="csX4" fmla="*/ 2441321 w 2441321"/>
+              <a:gd name="csY4" fmla="*/ 0 h 18288"/>
+              <a:gd name="csX5" fmla="*/ 2441321 w 2441321"/>
+              <a:gd name="csY5" fmla="*/ 18288 h 18288"/>
+              <a:gd name="csX6" fmla="*/ 1830991 w 2441321"/>
+              <a:gd name="csY6" fmla="*/ 18288 h 18288"/>
+              <a:gd name="csX7" fmla="*/ 1269487 w 2441321"/>
+              <a:gd name="csY7" fmla="*/ 18288 h 18288"/>
+              <a:gd name="csX8" fmla="*/ 707983 w 2441321"/>
+              <a:gd name="csY8" fmla="*/ 18288 h 18288"/>
+              <a:gd name="csX9" fmla="*/ 0 w 2441321"/>
+              <a:gd name="csY9" fmla="*/ 18288 h 18288"/>
+              <a:gd name="csX10" fmla="*/ 0 w 2441321"/>
+              <a:gd name="csY10" fmla="*/ 0 h 18288"/>
+            </a:gdLst>
+            <a:ahLst/>
+            <a:cxnLst>
+              <a:cxn ang="0">
+                <a:pos x="csX0" y="csY0"/>
+              </a:cxn>
+              <a:cxn ang="0">
+                <a:pos x="csX1" y="csY1"/>
+              </a:cxn>
+              <a:cxn ang="0">
+                <a:pos x="csX2" y="csY2"/>
+              </a:cxn>
+              <a:cxn ang="0">
+                <a:pos x="csX3" y="csY3"/>
+              </a:cxn>
+              <a:cxn ang="0">
+                <a:pos x="csX4" y="csY4"/>
+              </a:cxn>
+              <a:cxn ang="0">
+                <a:pos x="csX5" y="csY5"/>
+              </a:cxn>
+              <a:cxn ang="0">
+                <a:pos x="csX6" y="csY6"/>
+              </a:cxn>
+              <a:cxn ang="0">
+                <a:pos x="csX7" y="csY7"/>
+              </a:cxn>
+              <a:cxn ang="0">
+                <a:pos x="csX8" y="csY8"/>
+              </a:cxn>
+              <a:cxn ang="0">
+                <a:pos x="csX9" y="csY9"/>
+              </a:cxn>
+              <a:cxn ang="0">
+                <a:pos x="csX10" y="csY10"/>
+              </a:cxn>
+            </a:cxnLst>
+            <a:rect l="l" t="t" r="r" b="b"/>
+            <a:pathLst>
+              <a:path w="2441321" h="18288" fill="none" extrusionOk="0">
+                <a:moveTo>
+                  <a:pt x="0" y="0"/>
+                </a:moveTo>
+                <a:cubicBezTo>
+                  <a:pt x="273217" y="-17533"/>
+                  <a:pt x="355785" y="-4171"/>
+                  <a:pt x="585917" y="0"/>
+                </a:cubicBezTo>
+                <a:cubicBezTo>
+                  <a:pt x="816049" y="4171"/>
+                  <a:pt x="991446" y="-9419"/>
+                  <a:pt x="1196247" y="0"/>
+                </a:cubicBezTo>
+                <a:cubicBezTo>
+                  <a:pt x="1401048" y="9419"/>
+                  <a:pt x="1589984" y="-731"/>
+                  <a:pt x="1806578" y="0"/>
+                </a:cubicBezTo>
+                <a:cubicBezTo>
+                  <a:pt x="2023172" y="731"/>
+                  <a:pt x="2247754" y="8393"/>
+                  <a:pt x="2441321" y="0"/>
+                </a:cubicBezTo>
+                <a:cubicBezTo>
+                  <a:pt x="2441167" y="8655"/>
+                  <a:pt x="2440437" y="9975"/>
+                  <a:pt x="2441321" y="18288"/>
+                </a:cubicBezTo>
+                <a:cubicBezTo>
+                  <a:pt x="2169723" y="30506"/>
+                  <a:pt x="2045712" y="39140"/>
+                  <a:pt x="1830991" y="18288"/>
+                </a:cubicBezTo>
+                <a:cubicBezTo>
+                  <a:pt x="1616270" y="-2564"/>
+                  <a:pt x="1505876" y="3949"/>
+                  <a:pt x="1269487" y="18288"/>
+                </a:cubicBezTo>
+                <a:cubicBezTo>
+                  <a:pt x="1033098" y="32627"/>
+                  <a:pt x="908661" y="41191"/>
+                  <a:pt x="707983" y="18288"/>
+                </a:cubicBezTo>
+                <a:cubicBezTo>
+                  <a:pt x="507305" y="-4615"/>
+                  <a:pt x="333592" y="20759"/>
+                  <a:pt x="0" y="18288"/>
+                </a:cubicBezTo>
+                <a:cubicBezTo>
+                  <a:pt x="-688" y="11716"/>
+                  <a:pt x="875" y="6357"/>
+                  <a:pt x="0" y="0"/>
+                </a:cubicBezTo>
+                <a:close/>
+              </a:path>
+              <a:path w="2441321" h="18288" stroke="0" extrusionOk="0">
+                <a:moveTo>
+                  <a:pt x="0" y="0"/>
+                </a:moveTo>
+                <a:cubicBezTo>
+                  <a:pt x="207071" y="-14617"/>
+                  <a:pt x="444194" y="-15606"/>
+                  <a:pt x="585917" y="0"/>
+                </a:cubicBezTo>
+                <a:cubicBezTo>
+                  <a:pt x="727640" y="15606"/>
+                  <a:pt x="904326" y="-79"/>
+                  <a:pt x="1123008" y="0"/>
+                </a:cubicBezTo>
+                <a:cubicBezTo>
+                  <a:pt x="1341690" y="79"/>
+                  <a:pt x="1600014" y="10401"/>
+                  <a:pt x="1782164" y="0"/>
+                </a:cubicBezTo>
+                <a:cubicBezTo>
+                  <a:pt x="1964314" y="-10401"/>
+                  <a:pt x="2143537" y="-21488"/>
+                  <a:pt x="2441321" y="0"/>
+                </a:cubicBezTo>
+                <a:cubicBezTo>
+                  <a:pt x="2441735" y="5928"/>
+                  <a:pt x="2441551" y="11133"/>
+                  <a:pt x="2441321" y="18288"/>
+                </a:cubicBezTo>
+                <a:cubicBezTo>
+                  <a:pt x="2166745" y="28773"/>
+                  <a:pt x="2078726" y="15476"/>
+                  <a:pt x="1879817" y="18288"/>
+                </a:cubicBezTo>
+                <a:cubicBezTo>
+                  <a:pt x="1680908" y="21100"/>
+                  <a:pt x="1548770" y="-4127"/>
+                  <a:pt x="1318313" y="18288"/>
+                </a:cubicBezTo>
+                <a:cubicBezTo>
+                  <a:pt x="1087856" y="40703"/>
+                  <a:pt x="894613" y="3927"/>
+                  <a:pt x="659157" y="18288"/>
+                </a:cubicBezTo>
+                <a:cubicBezTo>
+                  <a:pt x="423701" y="32649"/>
+                  <a:pt x="246611" y="33975"/>
+                  <a:pt x="0" y="18288"/>
+                </a:cubicBezTo>
+                <a:cubicBezTo>
+                  <a:pt x="-348" y="10388"/>
+                  <a:pt x="-12" y="3969"/>
+                  <a:pt x="0" y="0"/>
+                </a:cubicBezTo>
+                <a:close/>
+              </a:path>
+            </a:pathLst>
+          </a:custGeom>
+          <a:solidFill>
+            <a:schemeClr val="accent2"/>
+          </a:solidFill>
+          <a:ln w="38100" cap="rnd">
+            <a:solidFill>
+              <a:schemeClr val="accent2"/>
+            </a:solidFill>
+            <a:round/>
+            <a:extLst>
+              <a:ext uri="{C807C97D-BFC1-408E-A445-0C87EB9F89A2}">
+                <ask:lineSketchStyleProps xmlns:ask="http://schemas.microsoft.com/office/drawing/2018/sketchyshapes" sd="1219033472">
+                  <a:prstGeom prst="rect">
+                    <a:avLst/>
+                  </a:prstGeom>
+                  <ask:type>
+                    <ask:lineSketchFreehand/>
+                  </ask:type>
+                </ask:lineSketchStyleProps>
+              </a:ext>
+            </a:extLst>
+          </a:ln>
+        </p:spPr>
+        <p:style>
+          <a:lnRef idx="2">
+            <a:schemeClr val="accent1">
+              <a:shade val="50000"/>
+            </a:schemeClr>
+          </a:lnRef>
+          <a:fillRef idx="1">
+            <a:schemeClr val="accent1"/>
+          </a:fillRef>
+          <a:effectRef idx="0">
+            <a:schemeClr val="accent1"/>
+          </a:effectRef>
+          <a:fontRef idx="minor">
+            <a:schemeClr val="lt1"/>
+          </a:fontRef>
+        </p:style>
+        <p:txBody>
+          <a:bodyPr rtlCol="0" anchor="ctr"/>
+          <a:lstStyle/>
+          <a:p>
+            <a:pPr algn="ctr"/>
+            <a:endParaRPr lang="en-US"/>
+          </a:p>
+        </p:txBody>
+      </p:sp>
+      <p:pic>
+        <p:nvPicPr>
+          <p:cNvPr id="4" name="Picture 3">
+            <a:extLst>
+              <a:ext uri="{FF2B5EF4-FFF2-40B4-BE49-F238E27FC236}">
+                <a16:creationId xmlns:a16="http://schemas.microsoft.com/office/drawing/2014/main" id="{24900902-C85A-2AEA-8525-4DABDA49B443}"/>
+              </a:ext>
+            </a:extLst>
+          </p:cNvPr>
+          <p:cNvPicPr>
+            <a:picLocks noChangeAspect="1"/>
+          </p:cNvPicPr>
+          <p:nvPr/>
+        </p:nvPicPr>
+        <p:blipFill>
+          <a:blip r:embed="rId2"/>
+          <a:stretch>
+            <a:fillRect/>
+          </a:stretch>
+        </p:blipFill>
+        <p:spPr>
+          <a:xfrm>
+            <a:off x="3036906" y="769177"/>
+            <a:ext cx="5993967" cy="5319645"/>
+          </a:xfrm>
+          <a:prstGeom prst="rect">
+            <a:avLst/>
+          </a:prstGeom>
+        </p:spPr>
+      </p:pic>
+    </p:spTree>
+    <p:extLst>
+      <p:ext uri="{BB962C8B-B14F-4D97-AF65-F5344CB8AC3E}">
+        <p14:creationId xmlns:p14="http://schemas.microsoft.com/office/powerpoint/2010/main" val="3667716501"/>
+      </p:ext>
+    </p:extLst>
+  </p:cSld>
+  <p:clrMapOvr>
+    <a:masterClrMapping/>
+  </p:clrMapOvr>
+</p:sld>
+</file>
+
+<file path=ppt/slides/slide11.xml><?xml version="1.0" encoding="utf-8"?>
+<p:sld xmlns:a="http://schemas.openxmlformats.org/drawingml/2006/main" xmlns:r="http://schemas.openxmlformats.org/officeDocument/2006/relationships" xmlns:p="http://schemas.openxmlformats.org/presentationml/2006/main">
+  <p:cSld>
+    <p:spTree>
+      <p:nvGrpSpPr>
+        <p:cNvPr id="1" name=""/>
+        <p:cNvGrpSpPr/>
+        <p:nvPr/>
+      </p:nvGrpSpPr>
+      <p:grpSpPr>
+        <a:xfrm>
+          <a:off x="0" y="0"/>
+          <a:ext cx="0" cy="0"/>
+          <a:chOff x="0" y="0"/>
+          <a:chExt cx="0" cy="0"/>
+        </a:xfrm>
+      </p:grpSpPr>
       <p:sp>
         <p:nvSpPr>
           <p:cNvPr id="2" name="Title 1"/>
@@ -3235,7 +3664,7 @@
 </p:sld>
 </file>
 
-<file path=ppt/slides/slide11.xml><?xml version="1.0" encoding="utf-8"?>
+<file path=ppt/slides/slide12.xml><?xml version="1.0" encoding="utf-8"?>
 <p:sld xmlns:a="http://schemas.openxmlformats.org/drawingml/2006/main" xmlns:r="http://schemas.openxmlformats.org/officeDocument/2006/relationships" xmlns:p="http://schemas.openxmlformats.org/presentationml/2006/main">
   <p:cSld>
     <p:spTree>
@@ -3356,7 +3785,7 @@
 </p:sld>
 </file>
 
-<file path=ppt/slides/slide12.xml><?xml version="1.0" encoding="utf-8"?>
+<file path=ppt/slides/slide13.xml><?xml version="1.0" encoding="utf-8"?>
 <p:sld xmlns:a="http://schemas.openxmlformats.org/drawingml/2006/main" xmlns:r="http://schemas.openxmlformats.org/officeDocument/2006/relationships" xmlns:p="http://schemas.openxmlformats.org/presentationml/2006/main">
   <p:cSld>
     <p:spTree>
@@ -3461,7 +3890,7 @@
 </p:sld>
 </file>
 
-<file path=ppt/slides/slide13.xml><?xml version="1.0" encoding="utf-8"?>
+<file path=ppt/slides/slide14.xml><?xml version="1.0" encoding="utf-8"?>
 <p:sld xmlns:a="http://schemas.openxmlformats.org/drawingml/2006/main" xmlns:r="http://schemas.openxmlformats.org/officeDocument/2006/relationships" xmlns:p="http://schemas.openxmlformats.org/presentationml/2006/main">
   <p:cSld>
     <p:spTree>
@@ -3567,7 +3996,7 @@
 </p:sld>
 </file>
 
-<file path=ppt/slides/slide14.xml><?xml version="1.0" encoding="utf-8"?>
+<file path=ppt/slides/slide15.xml><?xml version="1.0" encoding="utf-8"?>
 <p:sld xmlns:a="http://schemas.openxmlformats.org/drawingml/2006/main" xmlns:r="http://schemas.openxmlformats.org/officeDocument/2006/relationships" xmlns:p="http://schemas.openxmlformats.org/presentationml/2006/main">
   <p:cSld>
     <p:spTree>
@@ -4046,76 +4475,6 @@
           <a:lstStyle/>
           <a:p>
             <a:r>
-              <a:t>Numeric Correlation</a:t>
-            </a:r>
-          </a:p>
-        </p:txBody>
-      </p:sp>
-      <p:pic>
-        <p:nvPicPr>
-          <p:cNvPr id="3" name="Picture 2" descr="numeric_correlation.png"/>
-          <p:cNvPicPr>
-            <a:picLocks noChangeAspect="1"/>
-          </p:cNvPicPr>
-          <p:nvPr/>
-        </p:nvPicPr>
-        <p:blipFill>
-          <a:blip r:embed="rId2"/>
-          <a:stretch>
-            <a:fillRect/>
-          </a:stretch>
-        </p:blipFill>
-        <p:spPr>
-          <a:xfrm>
-            <a:off x="640080" y="1371600"/>
-            <a:ext cx="7863840" cy="5703765"/>
-          </a:xfrm>
-          <a:prstGeom prst="rect">
-            <a:avLst/>
-          </a:prstGeom>
-        </p:spPr>
-      </p:pic>
-    </p:spTree>
-  </p:cSld>
-  <p:clrMapOvr>
-    <a:masterClrMapping/>
-  </p:clrMapOvr>
-</p:sld>
-</file>
-
-<file path=ppt/slides/slide8.xml><?xml version="1.0" encoding="utf-8"?>
-<p:sld xmlns:a="http://schemas.openxmlformats.org/drawingml/2006/main" xmlns:r="http://schemas.openxmlformats.org/officeDocument/2006/relationships" xmlns:p="http://schemas.openxmlformats.org/presentationml/2006/main">
-  <p:cSld>
-    <p:spTree>
-      <p:nvGrpSpPr>
-        <p:cNvPr id="1" name=""/>
-        <p:cNvGrpSpPr/>
-        <p:nvPr/>
-      </p:nvGrpSpPr>
-      <p:grpSpPr>
-        <a:xfrm>
-          <a:off x="0" y="0"/>
-          <a:ext cx="0" cy="0"/>
-          <a:chOff x="0" y="0"/>
-          <a:chExt cx="0" cy="0"/>
-        </a:xfrm>
-      </p:grpSpPr>
-      <p:sp>
-        <p:nvSpPr>
-          <p:cNvPr id="2" name="Title 1"/>
-          <p:cNvSpPr>
-            <a:spLocks noGrp="1"/>
-          </p:cNvSpPr>
-          <p:nvPr>
-            <p:ph type="title"/>
-          </p:nvPr>
-        </p:nvSpPr>
-        <p:spPr/>
-        <p:txBody>
-          <a:bodyPr/>
-          <a:lstStyle/>
-          <a:p>
-            <a:r>
               <a:t>Monthly Maintenance Time Series</a:t>
             </a:r>
           </a:p>
@@ -4153,7 +4512,7 @@
 </p:sld>
 </file>
 
-<file path=ppt/slides/slide9.xml><?xml version="1.0" encoding="utf-8"?>
+<file path=ppt/slides/slide8.xml><?xml version="1.0" encoding="utf-8"?>
 <p:sld xmlns:a="http://schemas.openxmlformats.org/drawingml/2006/main" xmlns:r="http://schemas.openxmlformats.org/officeDocument/2006/relationships" xmlns:p="http://schemas.openxmlformats.org/presentationml/2006/main">
   <p:cSld>
     <p:spTree>
@@ -4209,6 +4568,89 @@
           <a:xfrm>
             <a:off x="640080" y="1371600"/>
             <a:ext cx="7863840" cy="3085961"/>
+          </a:xfrm>
+          <a:prstGeom prst="rect">
+            <a:avLst/>
+          </a:prstGeom>
+        </p:spPr>
+      </p:pic>
+    </p:spTree>
+  </p:cSld>
+  <p:clrMapOvr>
+    <a:masterClrMapping/>
+  </p:clrMapOvr>
+</p:sld>
+</file>
+
+<file path=ppt/slides/slide9.xml><?xml version="1.0" encoding="utf-8"?>
+<p:sld xmlns:a="http://schemas.openxmlformats.org/drawingml/2006/main" xmlns:r="http://schemas.openxmlformats.org/officeDocument/2006/relationships" xmlns:p="http://schemas.openxmlformats.org/presentationml/2006/main">
+  <p:cSld>
+    <p:spTree>
+      <p:nvGrpSpPr>
+        <p:cNvPr id="1" name=""/>
+        <p:cNvGrpSpPr/>
+        <p:nvPr/>
+      </p:nvGrpSpPr>
+      <p:grpSpPr>
+        <a:xfrm>
+          <a:off x="0" y="0"/>
+          <a:ext cx="0" cy="0"/>
+          <a:chOff x="0" y="0"/>
+          <a:chExt cx="0" cy="0"/>
+        </a:xfrm>
+      </p:grpSpPr>
+      <p:sp>
+        <p:nvSpPr>
+          <p:cNvPr id="2" name="Title 1"/>
+          <p:cNvSpPr>
+            <a:spLocks noGrp="1"/>
+          </p:cNvSpPr>
+          <p:nvPr>
+            <p:ph type="title"/>
+          </p:nvPr>
+        </p:nvSpPr>
+        <p:spPr/>
+        <p:txBody>
+          <a:bodyPr>
+            <a:normAutofit fontScale="90000"/>
+          </a:bodyPr>
+          <a:lstStyle/>
+          <a:p>
+            <a:r>
+              <a:rPr dirty="0"/>
+              <a:t>Numeric Correlation</a:t>
+            </a:r>
+            <a:br>
+              <a:rPr lang="en-US" dirty="0"/>
+            </a:br>
+            <a:endParaRPr dirty="0"/>
+          </a:p>
+        </p:txBody>
+      </p:sp>
+      <p:pic>
+        <p:nvPicPr>
+          <p:cNvPr id="5" name="Picture 4">
+            <a:extLst>
+              <a:ext uri="{FF2B5EF4-FFF2-40B4-BE49-F238E27FC236}">
+                <a16:creationId xmlns:a16="http://schemas.microsoft.com/office/drawing/2014/main" id="{B862216C-B7EB-ED19-6F31-5AED4218A386}"/>
+              </a:ext>
+            </a:extLst>
+          </p:cNvPr>
+          <p:cNvPicPr>
+            <a:picLocks noChangeAspect="1"/>
+          </p:cNvPicPr>
+          <p:nvPr/>
+        </p:nvPicPr>
+        <p:blipFill>
+          <a:blip r:embed="rId2"/>
+          <a:stretch>
+            <a:fillRect/>
+          </a:stretch>
+        </p:blipFill>
+        <p:spPr>
+          <a:xfrm>
+            <a:off x="1271919" y="1101423"/>
+            <a:ext cx="6372890" cy="5580364"/>
           </a:xfrm>
           <a:prstGeom prst="rect">
             <a:avLst/>
